--- a/R labs/presentations/Lab15 - Simulations.pptx
+++ b/R labs/presentations/Lab15 - Simulations.pptx
@@ -239,7 +239,7 @@
           <a:p>
             <a:fld id="{E6EAA34A-B98B-374C-9696-DDF9501E09F3}" type="datetimeFigureOut">
               <a:rPr lang="en-US" smtClean="0"/>
-              <a:t>7/1/25</a:t>
+              <a:t>6/2/26</a:t>
             </a:fld>
             <a:endParaRPr lang="en-US"/>
           </a:p>
@@ -871,7 +871,7 @@
               <a:pPr>
                 <a:defRPr/>
               </a:pPr>
-              <a:t>7/1/25</a:t>
+              <a:t>6/2/26</a:t>
             </a:fld>
             <a:endParaRPr lang="en-US"/>
           </a:p>
@@ -1067,7 +1067,7 @@
               <a:pPr>
                 <a:defRPr/>
               </a:pPr>
-              <a:t>7/1/25</a:t>
+              <a:t>6/2/26</a:t>
             </a:fld>
             <a:endParaRPr lang="en-US"/>
           </a:p>
@@ -1272,7 +1272,7 @@
               <a:pPr>
                 <a:defRPr/>
               </a:pPr>
-              <a:t>7/1/25</a:t>
+              <a:t>6/2/26</a:t>
             </a:fld>
             <a:endParaRPr lang="en-US"/>
           </a:p>
@@ -1469,7 +1469,7 @@
               <a:pPr>
                 <a:defRPr/>
               </a:pPr>
-              <a:t>7/1/25</a:t>
+              <a:t>6/2/26</a:t>
             </a:fld>
             <a:endParaRPr lang="en-US"/>
           </a:p>
@@ -1742,7 +1742,7 @@
               <a:pPr>
                 <a:defRPr/>
               </a:pPr>
-              <a:t>7/1/25</a:t>
+              <a:t>6/2/26</a:t>
             </a:fld>
             <a:endParaRPr lang="en-US"/>
           </a:p>
@@ -2056,7 +2056,7 @@
               <a:pPr>
                 <a:defRPr/>
               </a:pPr>
-              <a:t>7/1/25</a:t>
+              <a:t>6/2/26</a:t>
             </a:fld>
             <a:endParaRPr lang="en-US"/>
           </a:p>
@@ -2379,7 +2379,7 @@
               <a:pPr>
                 <a:defRPr/>
               </a:pPr>
-              <a:t>7/1/25</a:t>
+              <a:t>6/2/26</a:t>
             </a:fld>
             <a:endParaRPr lang="en-US"/>
           </a:p>
@@ -2523,7 +2523,7 @@
               <a:pPr>
                 <a:defRPr/>
               </a:pPr>
-              <a:t>7/1/25</a:t>
+              <a:t>6/2/26</a:t>
             </a:fld>
             <a:endParaRPr lang="en-US"/>
           </a:p>
@@ -2645,7 +2645,7 @@
               <a:pPr>
                 <a:defRPr/>
               </a:pPr>
-              <a:t>7/1/25</a:t>
+              <a:t>6/2/26</a:t>
             </a:fld>
             <a:endParaRPr lang="en-US"/>
           </a:p>
@@ -2947,7 +2947,7 @@
               <a:pPr>
                 <a:defRPr/>
               </a:pPr>
-              <a:t>7/1/25</a:t>
+              <a:t>6/2/26</a:t>
             </a:fld>
             <a:endParaRPr lang="en-US"/>
           </a:p>
@@ -3234,7 +3234,7 @@
               <a:pPr>
                 <a:defRPr/>
               </a:pPr>
-              <a:t>7/1/25</a:t>
+              <a:t>6/2/26</a:t>
             </a:fld>
             <a:endParaRPr lang="en-US"/>
           </a:p>
@@ -3358,14 +3358,14 @@
           </a:ln>
           <a:extLst>
             <a:ext uri="{909E8E84-426E-40dd-AFC4-6F175D3DCCD1}">
-              <a14:hiddenFill xmlns:a14="http://schemas.microsoft.com/office/drawing/2010/main" xmlns="">
+              <a14:hiddenFill xmlns="" xmlns:a14="http://schemas.microsoft.com/office/drawing/2010/main">
                 <a:solidFill>
                   <a:srgbClr val="FFFFFF"/>
                 </a:solidFill>
               </a14:hiddenFill>
             </a:ext>
             <a:ext uri="{91240B29-F687-4f45-9708-019B960494DF}">
-              <a14:hiddenLine xmlns:a14="http://schemas.microsoft.com/office/drawing/2010/main" xmlns="" w="9525">
+              <a14:hiddenLine xmlns="" xmlns:a14="http://schemas.microsoft.com/office/drawing/2010/main" w="9525">
                 <a:solidFill>
                   <a:srgbClr val="000000"/>
                 </a:solidFill>
@@ -3375,7 +3375,7 @@
               </a14:hiddenLine>
             </a:ext>
             <a:ext uri="{FAA26D3D-D897-4be2-8F04-BA451C77F1D7}">
-              <ma14:placeholderFlag xmlns:ma14="http://schemas.microsoft.com/office/mac/drawingml/2011/main" xmlns="" val="1"/>
+              <ma14:placeholderFlag xmlns="" xmlns:ma14="http://schemas.microsoft.com/office/mac/drawingml/2011/main" val="1"/>
             </a:ext>
           </a:extLst>
         </p:spPr>
@@ -3426,14 +3426,14 @@
           </a:ln>
           <a:extLst>
             <a:ext uri="{909E8E84-426E-40dd-AFC4-6F175D3DCCD1}">
-              <a14:hiddenFill xmlns:a14="http://schemas.microsoft.com/office/drawing/2010/main" xmlns="">
+              <a14:hiddenFill xmlns="" xmlns:a14="http://schemas.microsoft.com/office/drawing/2010/main">
                 <a:solidFill>
                   <a:srgbClr val="FFFFFF"/>
                 </a:solidFill>
               </a14:hiddenFill>
             </a:ext>
             <a:ext uri="{91240B29-F687-4f45-9708-019B960494DF}">
-              <a14:hiddenLine xmlns:a14="http://schemas.microsoft.com/office/drawing/2010/main" xmlns="" w="9525">
+              <a14:hiddenLine xmlns="" xmlns:a14="http://schemas.microsoft.com/office/drawing/2010/main" w="9525">
                 <a:solidFill>
                   <a:srgbClr val="000000"/>
                 </a:solidFill>
@@ -3443,7 +3443,7 @@
               </a14:hiddenLine>
             </a:ext>
             <a:ext uri="{FAA26D3D-D897-4be2-8F04-BA451C77F1D7}">
-              <ma14:placeholderFlag xmlns:ma14="http://schemas.microsoft.com/office/mac/drawingml/2011/main" xmlns="" val="1"/>
+              <ma14:placeholderFlag xmlns="" xmlns:ma14="http://schemas.microsoft.com/office/mac/drawingml/2011/main" val="1"/>
             </a:ext>
           </a:extLst>
         </p:spPr>
@@ -3542,7 +3542,7 @@
               <a:pPr>
                 <a:defRPr/>
               </a:pPr>
-              <a:t>7/1/25</a:t>
+              <a:t>6/2/26</a:t>
             </a:fld>
             <a:endParaRPr lang="en-US" dirty="0"/>
           </a:p>
@@ -4373,14 +4373,14 @@
               <a:buNone/>
             </a:pPr>
             <a:r>
-              <a:rPr lang="en-US" sz="1500" b="1" dirty="0">
+              <a:rPr lang="en-US" sz="1500" b="1">
                 <a:solidFill>
                   <a:srgbClr val="C00000"/>
                 </a:solidFill>
                 <a:latin typeface="Garamond" panose="02020404030301010803" pitchFamily="18" charset="0"/>
                 <a:cs typeface="Times New Roman" pitchFamily="18" charset="0"/>
               </a:rPr>
-              <a:t>2025</a:t>
+              <a:t>2026</a:t>
             </a:r>
             <a:endParaRPr lang="en-US" sz="1500" dirty="0">
               <a:latin typeface="Garamond" panose="02020404030301010803" pitchFamily="18" charset="0"/>
